--- a/docs/Презентация.Машинное обучение.pptx
+++ b/docs/Презентация.Машинное обучение.pptx
@@ -4121,7 +4121,7 @@
         </p:blipFill>
         <p:spPr>
           <a:xfrm>
-            <a:off x="6546737" y="2219636"/>
+            <a:off x="6535014" y="2219636"/>
             <a:ext cx="4983479" cy="2803207"/>
           </a:xfrm>
           <a:prstGeom prst="rect">

--- a/docs/Презентация.Машинное обучение.pptx
+++ b/docs/Презентация.Машинное обучение.pptx
@@ -3337,13 +3337,8 @@
           </a:pPr>
           <a:r>
             <a:rPr lang="ru-RU" sz="1400" dirty="0"/>
-            <a:t>Описать модель на языке </a:t>
+            <a:t>Спроектировать нейронную сеть для нашей модели (список слоев)</a:t>
           </a:r>
-          <a:r>
-            <a:rPr lang="en-US" sz="1400" dirty="0"/>
-            <a:t>Python</a:t>
-          </a:r>
-          <a:endParaRPr lang="ru-RU" sz="1400" dirty="0"/>
         </a:p>
       </dgm:t>
     </dgm:pt>
@@ -3381,8 +3376,13 @@
           </a:pPr>
           <a:r>
             <a:rPr lang="ru-RU" sz="1400" dirty="0"/>
-            <a:t>Спроектировать нейронную сеть для нашей модели (список слоев)</a:t>
+            <a:t>Описать модель на языке </a:t>
           </a:r>
+          <a:r>
+            <a:rPr lang="en-US" sz="1400" dirty="0"/>
+            <a:t>Python</a:t>
+          </a:r>
+          <a:endParaRPr lang="ru-RU" sz="1400" dirty="0"/>
         </a:p>
       </dgm:t>
     </dgm:pt>
@@ -3677,15 +3677,7 @@
           </a:pPr>
           <a:r>
             <a:rPr lang="ru-RU" sz="1400" dirty="0"/>
-            <a:t>Разработка клиентской части приложения (шаблоны </a:t>
-          </a:r>
-          <a:r>
-            <a:rPr lang="en-US" sz="1400" dirty="0"/>
-            <a:t>HTML</a:t>
-          </a:r>
-          <a:r>
-            <a:rPr lang="ru-RU" sz="1400" dirty="0"/>
-            <a:t>/стили)</a:t>
+            <a:t>Разработка серверной части приложения</a:t>
           </a:r>
         </a:p>
       </dgm:t>
@@ -3724,8 +3716,17 @@
           </a:pPr>
           <a:r>
             <a:rPr lang="ru-RU" sz="1400" dirty="0"/>
-            <a:t>Разработка серверной части приложения</a:t>
+            <a:t>Разработка клиентской части приложения (шаблоны </a:t>
           </a:r>
+          <a:r>
+            <a:rPr lang="en-US" sz="1400" dirty="0"/>
+            <a:t>HTML</a:t>
+          </a:r>
+          <a:r>
+            <a:rPr lang="ru-RU" sz="1400"/>
+            <a:t>/стили)</a:t>
+          </a:r>
+          <a:endParaRPr lang="ru-RU" sz="1400" dirty="0"/>
         </a:p>
       </dgm:t>
     </dgm:pt>
@@ -5123,13 +5124,8 @@
           </a:pPr>
           <a:r>
             <a:rPr lang="ru-RU" sz="1400" kern="1200" dirty="0"/>
-            <a:t>Описать модель на языке </a:t>
+            <a:t>Спроектировать нейронную сеть для нашей модели (список слоев)</a:t>
           </a:r>
-          <a:r>
-            <a:rPr lang="en-US" sz="1400" kern="1200" dirty="0"/>
-            <a:t>Python</a:t>
-          </a:r>
-          <a:endParaRPr lang="ru-RU" sz="1400" kern="1200" dirty="0"/>
         </a:p>
       </dsp:txBody>
       <dsp:txXfrm>
@@ -5331,8 +5327,13 @@
           </a:pPr>
           <a:r>
             <a:rPr lang="ru-RU" sz="1400" kern="1200" dirty="0"/>
-            <a:t>Спроектировать нейронную сеть для нашей модели (список слоев)</a:t>
+            <a:t>Описать модель на языке </a:t>
           </a:r>
+          <a:r>
+            <a:rPr lang="en-US" sz="1400" kern="1200" dirty="0"/>
+            <a:t>Python</a:t>
+          </a:r>
+          <a:endParaRPr lang="ru-RU" sz="1400" kern="1200" dirty="0"/>
         </a:p>
       </dsp:txBody>
       <dsp:txXfrm>
@@ -6053,15 +6054,7 @@
           </a:pPr>
           <a:r>
             <a:rPr lang="ru-RU" sz="1400" kern="1200" dirty="0"/>
-            <a:t>Разработка клиентской части приложения (шаблоны </a:t>
-          </a:r>
-          <a:r>
-            <a:rPr lang="en-US" sz="1400" kern="1200" dirty="0"/>
-            <a:t>HTML</a:t>
-          </a:r>
-          <a:r>
-            <a:rPr lang="ru-RU" sz="1400" kern="1200" dirty="0"/>
-            <a:t>/стили)</a:t>
+            <a:t>Разработка серверной части приложения</a:t>
           </a:r>
         </a:p>
       </dsp:txBody>
@@ -6264,8 +6257,17 @@
           </a:pPr>
           <a:r>
             <a:rPr lang="ru-RU" sz="1400" kern="1200" dirty="0"/>
-            <a:t>Разработка серверной части приложения</a:t>
+            <a:t>Разработка клиентской части приложения (шаблоны </a:t>
           </a:r>
+          <a:r>
+            <a:rPr lang="en-US" sz="1400" kern="1200" dirty="0"/>
+            <a:t>HTML</a:t>
+          </a:r>
+          <a:r>
+            <a:rPr lang="ru-RU" sz="1400" kern="1200"/>
+            <a:t>/стили)</a:t>
+          </a:r>
+          <a:endParaRPr lang="ru-RU" sz="1400" kern="1200" dirty="0"/>
         </a:p>
       </dsp:txBody>
       <dsp:txXfrm>
@@ -12257,7 +12259,7 @@
           <a:p>
             <a:fld id="{F8E8F3B0-4B07-478A-ADBD-B4202A2F879F}" type="datetimeFigureOut">
               <a:rPr lang="ru-RU" smtClean="0"/>
-              <a:t>15.01.2026</a:t>
+              <a:t>16.01.2026</a:t>
             </a:fld>
             <a:endParaRPr lang="ru-RU"/>
           </a:p>
@@ -12455,7 +12457,7 @@
           <a:p>
             <a:fld id="{F8E8F3B0-4B07-478A-ADBD-B4202A2F879F}" type="datetimeFigureOut">
               <a:rPr lang="ru-RU" smtClean="0"/>
-              <a:t>15.01.2026</a:t>
+              <a:t>16.01.2026</a:t>
             </a:fld>
             <a:endParaRPr lang="ru-RU"/>
           </a:p>
@@ -12663,7 +12665,7 @@
           <a:p>
             <a:fld id="{F8E8F3B0-4B07-478A-ADBD-B4202A2F879F}" type="datetimeFigureOut">
               <a:rPr lang="ru-RU" smtClean="0"/>
-              <a:t>15.01.2026</a:t>
+              <a:t>16.01.2026</a:t>
             </a:fld>
             <a:endParaRPr lang="ru-RU"/>
           </a:p>
@@ -12861,7 +12863,7 @@
           <a:p>
             <a:fld id="{F8E8F3B0-4B07-478A-ADBD-B4202A2F879F}" type="datetimeFigureOut">
               <a:rPr lang="ru-RU" smtClean="0"/>
-              <a:t>15.01.2026</a:t>
+              <a:t>16.01.2026</a:t>
             </a:fld>
             <a:endParaRPr lang="ru-RU"/>
           </a:p>
@@ -13136,7 +13138,7 @@
           <a:p>
             <a:fld id="{F8E8F3B0-4B07-478A-ADBD-B4202A2F879F}" type="datetimeFigureOut">
               <a:rPr lang="ru-RU" smtClean="0"/>
-              <a:t>15.01.2026</a:t>
+              <a:t>16.01.2026</a:t>
             </a:fld>
             <a:endParaRPr lang="ru-RU"/>
           </a:p>
@@ -13401,7 +13403,7 @@
           <a:p>
             <a:fld id="{F8E8F3B0-4B07-478A-ADBD-B4202A2F879F}" type="datetimeFigureOut">
               <a:rPr lang="ru-RU" smtClean="0"/>
-              <a:t>15.01.2026</a:t>
+              <a:t>16.01.2026</a:t>
             </a:fld>
             <a:endParaRPr lang="ru-RU"/>
           </a:p>
@@ -13813,7 +13815,7 @@
           <a:p>
             <a:fld id="{F8E8F3B0-4B07-478A-ADBD-B4202A2F879F}" type="datetimeFigureOut">
               <a:rPr lang="ru-RU" smtClean="0"/>
-              <a:t>15.01.2026</a:t>
+              <a:t>16.01.2026</a:t>
             </a:fld>
             <a:endParaRPr lang="ru-RU"/>
           </a:p>
@@ -13954,7 +13956,7 @@
           <a:p>
             <a:fld id="{F8E8F3B0-4B07-478A-ADBD-B4202A2F879F}" type="datetimeFigureOut">
               <a:rPr lang="ru-RU" smtClean="0"/>
-              <a:t>15.01.2026</a:t>
+              <a:t>16.01.2026</a:t>
             </a:fld>
             <a:endParaRPr lang="ru-RU"/>
           </a:p>
@@ -14067,7 +14069,7 @@
           <a:p>
             <a:fld id="{F8E8F3B0-4B07-478A-ADBD-B4202A2F879F}" type="datetimeFigureOut">
               <a:rPr lang="ru-RU" smtClean="0"/>
-              <a:t>15.01.2026</a:t>
+              <a:t>16.01.2026</a:t>
             </a:fld>
             <a:endParaRPr lang="ru-RU"/>
           </a:p>
@@ -14378,7 +14380,7 @@
           <a:p>
             <a:fld id="{F8E8F3B0-4B07-478A-ADBD-B4202A2F879F}" type="datetimeFigureOut">
               <a:rPr lang="ru-RU" smtClean="0"/>
-              <a:t>15.01.2026</a:t>
+              <a:t>16.01.2026</a:t>
             </a:fld>
             <a:endParaRPr lang="ru-RU"/>
           </a:p>
@@ -14666,7 +14668,7 @@
           <a:p>
             <a:fld id="{F8E8F3B0-4B07-478A-ADBD-B4202A2F879F}" type="datetimeFigureOut">
               <a:rPr lang="ru-RU" smtClean="0"/>
-              <a:t>15.01.2026</a:t>
+              <a:t>16.01.2026</a:t>
             </a:fld>
             <a:endParaRPr lang="ru-RU"/>
           </a:p>
@@ -14907,7 +14909,7 @@
           <a:p>
             <a:fld id="{F8E8F3B0-4B07-478A-ADBD-B4202A2F879F}" type="datetimeFigureOut">
               <a:rPr lang="ru-RU" smtClean="0"/>
-              <a:t>15.01.2026</a:t>
+              <a:t>16.01.2026</a:t>
             </a:fld>
             <a:endParaRPr lang="ru-RU"/>
           </a:p>
@@ -15883,7 +15885,7 @@
         <p:spPr>
           <a:xfrm>
             <a:off x="536954" y="4215012"/>
-            <a:ext cx="4170217" cy="2246769"/>
+            <a:ext cx="4170217" cy="2677656"/>
           </a:xfrm>
           <a:prstGeom prst="rect">
             <a:avLst/>
@@ -15947,7 +15949,7 @@
                 <a:ea typeface="Calibri" panose="020F0502020204030204" pitchFamily="34" charset="0"/>
                 <a:cs typeface="Times New Roman" panose="02020603050405020304" pitchFamily="18" charset="0"/>
               </a:rPr>
-              <a:t>Прогноз оценки по математике»</a:t>
+              <a:t>Прогноз итоговой годовой оценки по математике»</a:t>
             </a:r>
             <a:endParaRPr lang="ru-RU" sz="2800" b="1" dirty="0">
               <a:solidFill>
@@ -15982,7 +15984,7 @@
         </p:nvSpPr>
         <p:spPr>
           <a:xfrm>
-            <a:off x="6546737" y="399545"/>
+            <a:off x="6535014" y="505052"/>
             <a:ext cx="4434177" cy="1815882"/>
           </a:xfrm>
           <a:prstGeom prst="rect">
@@ -17271,33 +17273,7 @@
                 <a:ea typeface="Calibri" panose="020F0502020204030204" pitchFamily="34" charset="0"/>
                 <a:cs typeface="Times New Roman" panose="02020603050405020304" pitchFamily="18" charset="0"/>
               </a:rPr>
-              <a:t>Происходит </a:t>
-            </a:r>
-            <a:r>
-              <a:rPr lang="ru-RU" dirty="0" err="1">
-                <a:solidFill>
-                  <a:schemeClr val="tx2">
-                    <a:lumMod val="50000"/>
-                  </a:schemeClr>
-                </a:solidFill>
-                <a:latin typeface="Calibri" panose="020F0502020204030204" pitchFamily="34" charset="0"/>
-                <a:ea typeface="Calibri" panose="020F0502020204030204" pitchFamily="34" charset="0"/>
-                <a:cs typeface="Times New Roman" panose="02020603050405020304" pitchFamily="18" charset="0"/>
-              </a:rPr>
-              <a:t>заполнеие</a:t>
-            </a:r>
-            <a:r>
-              <a:rPr lang="ru-RU" dirty="0">
-                <a:solidFill>
-                  <a:schemeClr val="tx2">
-                    <a:lumMod val="50000"/>
-                  </a:schemeClr>
-                </a:solidFill>
-                <a:latin typeface="Calibri" panose="020F0502020204030204" pitchFamily="34" charset="0"/>
-                <a:ea typeface="Calibri" panose="020F0502020204030204" pitchFamily="34" charset="0"/>
-                <a:cs typeface="Times New Roman" panose="02020603050405020304" pitchFamily="18" charset="0"/>
-              </a:rPr>
-              <a:t> весов</a:t>
+              <a:t>Происходит заполнение весов</a:t>
             </a:r>
             <a:r>
               <a:rPr lang="ru-RU" b="1" i="1" dirty="0">
@@ -17852,7 +17828,7 @@
           <p:nvPr>
             <p:extLst>
               <p:ext uri="{D42A27DB-BD31-4B8C-83A1-F6EECF244321}">
-                <p14:modId xmlns:p14="http://schemas.microsoft.com/office/powerpoint/2010/main" val="3305756859"/>
+                <p14:modId xmlns:p14="http://schemas.microsoft.com/office/powerpoint/2010/main" val="398737608"/>
               </p:ext>
             </p:extLst>
           </p:nvPr>
@@ -17931,7 +17907,7 @@
           <p:nvPr>
             <p:extLst>
               <p:ext uri="{D42A27DB-BD31-4B8C-83A1-F6EECF244321}">
-                <p14:modId xmlns:p14="http://schemas.microsoft.com/office/powerpoint/2010/main" val="623359920"/>
+                <p14:modId xmlns:p14="http://schemas.microsoft.com/office/powerpoint/2010/main" val="2465730688"/>
               </p:ext>
             </p:extLst>
           </p:nvPr>
@@ -19592,7 +19568,7 @@
                 <a:ea typeface="Calibri" panose="020F0502020204030204" pitchFamily="34" charset="0"/>
                 <a:cs typeface="Times New Roman" panose="02020603050405020304" pitchFamily="18" charset="0"/>
               </a:rPr>
-              <a:t>Разработка модели ИИ</a:t>
+              <a:t>Нейронная сеть модели</a:t>
             </a:r>
             <a:endParaRPr lang="ru-RU" sz="4000" dirty="0">
               <a:solidFill>

--- a/docs/Презентация.Машинное обучение.pptx
+++ b/docs/Презентация.Машинное обучение.pptx
@@ -7019,7 +7019,7 @@
       </dsp:nvSpPr>
       <dsp:spPr bwMode="auto">
         <a:xfrm>
-          <a:off x="110277" y="1790044"/>
+          <a:off x="110272" y="1790044"/>
           <a:ext cx="461463" cy="692195"/>
         </a:xfrm>
         <a:prstGeom prst="rect">
@@ -7265,7 +7265,7 @@
       </dsp:nvSpPr>
       <dsp:spPr bwMode="auto">
         <a:xfrm>
-          <a:off x="148221" y="1177480"/>
+          <a:off x="148221" y="1177470"/>
           <a:ext cx="746668" cy="1120002"/>
         </a:xfrm>
         <a:prstGeom prst="rect">
@@ -12425,7 +12425,7 @@
             </a:pPr>
             <a:fld id="{F8E8F3B0-4B07-478A-ADBD-B4202A2F879F}" type="datetimeFigureOut">
               <a:rPr lang="ru-RU"/>
-              <a:t>19.01.2026</a:t>
+              <a:t>21.01.2026</a:t>
             </a:fld>
             <a:endParaRPr lang="ru-RU"/>
           </a:p>
@@ -12616,7 +12616,7 @@
             </a:pPr>
             <a:fld id="{F8E8F3B0-4B07-478A-ADBD-B4202A2F879F}" type="datetimeFigureOut">
               <a:rPr lang="ru-RU"/>
-              <a:t>19.01.2026</a:t>
+              <a:t>21.01.2026</a:t>
             </a:fld>
             <a:endParaRPr lang="ru-RU"/>
           </a:p>
@@ -12817,7 +12817,7 @@
             </a:pPr>
             <a:fld id="{F8E8F3B0-4B07-478A-ADBD-B4202A2F879F}" type="datetimeFigureOut">
               <a:rPr lang="ru-RU"/>
-              <a:t>19.01.2026</a:t>
+              <a:t>21.01.2026</a:t>
             </a:fld>
             <a:endParaRPr lang="ru-RU"/>
           </a:p>
@@ -13008,7 +13008,7 @@
             </a:pPr>
             <a:fld id="{F8E8F3B0-4B07-478A-ADBD-B4202A2F879F}" type="datetimeFigureOut">
               <a:rPr lang="ru-RU"/>
-              <a:t>19.01.2026</a:t>
+              <a:t>21.01.2026</a:t>
             </a:fld>
             <a:endParaRPr lang="ru-RU"/>
           </a:p>
@@ -13264,7 +13264,7 @@
             </a:pPr>
             <a:fld id="{F8E8F3B0-4B07-478A-ADBD-B4202A2F879F}" type="datetimeFigureOut">
               <a:rPr lang="ru-RU"/>
-              <a:t>19.01.2026</a:t>
+              <a:t>21.01.2026</a:t>
             </a:fld>
             <a:endParaRPr lang="ru-RU"/>
           </a:p>
@@ -13531,7 +13531,7 @@
             </a:pPr>
             <a:fld id="{F8E8F3B0-4B07-478A-ADBD-B4202A2F879F}" type="datetimeFigureOut">
               <a:rPr lang="ru-RU"/>
-              <a:t>19.01.2026</a:t>
+              <a:t>21.01.2026</a:t>
             </a:fld>
             <a:endParaRPr lang="ru-RU"/>
           </a:p>
@@ -13939,7 +13939,7 @@
             </a:pPr>
             <a:fld id="{F8E8F3B0-4B07-478A-ADBD-B4202A2F879F}" type="datetimeFigureOut">
               <a:rPr lang="ru-RU"/>
-              <a:t>19.01.2026</a:t>
+              <a:t>21.01.2026</a:t>
             </a:fld>
             <a:endParaRPr lang="ru-RU"/>
           </a:p>
@@ -14064,7 +14064,7 @@
             </a:pPr>
             <a:fld id="{F8E8F3B0-4B07-478A-ADBD-B4202A2F879F}" type="datetimeFigureOut">
               <a:rPr lang="ru-RU"/>
-              <a:t>19.01.2026</a:t>
+              <a:t>21.01.2026</a:t>
             </a:fld>
             <a:endParaRPr lang="ru-RU"/>
           </a:p>
@@ -14163,7 +14163,7 @@
             </a:pPr>
             <a:fld id="{F8E8F3B0-4B07-478A-ADBD-B4202A2F879F}" type="datetimeFigureOut">
               <a:rPr lang="ru-RU"/>
-              <a:t>19.01.2026</a:t>
+              <a:t>21.01.2026</a:t>
             </a:fld>
             <a:endParaRPr lang="ru-RU"/>
           </a:p>
@@ -14464,7 +14464,7 @@
             </a:pPr>
             <a:fld id="{F8E8F3B0-4B07-478A-ADBD-B4202A2F879F}" type="datetimeFigureOut">
               <a:rPr lang="ru-RU"/>
-              <a:t>19.01.2026</a:t>
+              <a:t>21.01.2026</a:t>
             </a:fld>
             <a:endParaRPr lang="ru-RU"/>
           </a:p>
@@ -14730,7 +14730,7 @@
             </a:pPr>
             <a:fld id="{F8E8F3B0-4B07-478A-ADBD-B4202A2F879F}" type="datetimeFigureOut">
               <a:rPr lang="ru-RU"/>
-              <a:t>19.01.2026</a:t>
+              <a:t>21.01.2026</a:t>
             </a:fld>
             <a:endParaRPr lang="ru-RU"/>
           </a:p>
@@ -14964,7 +14964,7 @@
             </a:pPr>
             <a:fld id="{F8E8F3B0-4B07-478A-ADBD-B4202A2F879F}" type="datetimeFigureOut">
               <a:rPr lang="ru-RU"/>
-              <a:t>19.01.2026</a:t>
+              <a:t>21.01.2026</a:t>
             </a:fld>
             <a:endParaRPr lang="ru-RU"/>
           </a:p>
@@ -19753,7 +19753,7 @@
               <a:defRPr/>
             </a:pPr>
             <a:r>
-              <a:rPr lang="en-US" sz="4000">
+              <a:rPr lang="en-US" sz="4000" dirty="0">
                 <a:solidFill>
                   <a:schemeClr val="tx2">
                     <a:lumMod val="75000"/>
@@ -19766,7 +19766,7 @@
               <a:t>Web </a:t>
             </a:r>
             <a:r>
-              <a:rPr lang="ru-RU" sz="4000">
+              <a:rPr lang="ru-RU" sz="4000" dirty="0">
                 <a:solidFill>
                   <a:schemeClr val="tx2">
                     <a:lumMod val="75000"/>
@@ -19778,7 +19778,7 @@
               </a:rPr>
               <a:t>приложение</a:t>
             </a:r>
-            <a:endParaRPr lang="ru-RU" sz="4000">
+            <a:endParaRPr lang="ru-RU" sz="4000" dirty="0">
               <a:solidFill>
                 <a:schemeClr val="tx2">
                   <a:lumMod val="75000"/>
@@ -19814,7 +19814,7 @@
               <a:defRPr/>
             </a:pPr>
             <a:r>
-              <a:rPr lang="en-US" sz="2400">
+              <a:rPr lang="en-US" sz="2400" dirty="0">
                 <a:solidFill>
                   <a:schemeClr val="accent2">
                     <a:lumMod val="50000"/>
@@ -19823,7 +19823,7 @@
               </a:rPr>
               <a:t>https://ml-project.publicvm.com/</a:t>
             </a:r>
-            <a:endParaRPr lang="ru-RU" sz="2400">
+            <a:endParaRPr lang="ru-RU" sz="2400" dirty="0">
               <a:solidFill>
                 <a:schemeClr val="accent2">
                   <a:lumMod val="50000"/>
@@ -19859,7 +19859,7 @@
               <a:defRPr/>
             </a:pPr>
             <a:r>
-              <a:rPr lang="en-US" sz="3200">
+              <a:rPr lang="en-US" sz="3200" dirty="0">
                 <a:solidFill>
                   <a:schemeClr val="tx2">
                     <a:lumMod val="75000"/>
@@ -19871,7 +19871,7 @@
               </a:rPr>
               <a:t>URL:</a:t>
             </a:r>
-            <a:endParaRPr lang="ru-RU" sz="3200">
+            <a:endParaRPr lang="ru-RU" sz="3200" dirty="0">
               <a:solidFill>
                 <a:schemeClr val="tx2">
                   <a:lumMod val="75000"/>
@@ -19883,7 +19883,7 @@
       </p:sp>
       <p:pic>
         <p:nvPicPr>
-          <p:cNvPr id="3" name="Рисунок 2"/>
+          <p:cNvPr id="5" name="Рисунок 4"/>
           <p:cNvPicPr>
             <a:picLocks noChangeAspect="1"/>
           </p:cNvPicPr>
@@ -19891,28 +19891,6 @@
         </p:nvPicPr>
         <p:blipFill>
           <a:blip r:embed="rId3"/>
-          <a:stretch/>
-        </p:blipFill>
-        <p:spPr bwMode="auto">
-          <a:xfrm>
-            <a:off x="1303556" y="2768689"/>
-            <a:ext cx="2909424" cy="2909424"/>
-          </a:xfrm>
-          <a:prstGeom prst="rect">
-            <a:avLst/>
-          </a:prstGeom>
-        </p:spPr>
-      </p:pic>
-      <p:pic>
-        <p:nvPicPr>
-          <p:cNvPr id="5" name="Рисунок 4"/>
-          <p:cNvPicPr>
-            <a:picLocks noChangeAspect="1"/>
-          </p:cNvPicPr>
-          <p:nvPr/>
-        </p:nvPicPr>
-        <p:blipFill>
-          <a:blip r:embed="rId4"/>
           <a:srcRect t="8265"/>
           <a:stretch/>
         </p:blipFill>
@@ -19931,6 +19909,42 @@
               </a:schemeClr>
             </a:solidFill>
           </a:ln>
+        </p:spPr>
+      </p:pic>
+      <p:pic>
+        <p:nvPicPr>
+          <p:cNvPr id="12" name="Рисунок 11">
+            <a:extLst>
+              <a:ext uri="{FF2B5EF4-FFF2-40B4-BE49-F238E27FC236}">
+                <a16:creationId xmlns:a16="http://schemas.microsoft.com/office/drawing/2014/main" id="{BD28CA00-582A-F0B1-6711-4BCBDCF4544F}"/>
+              </a:ext>
+            </a:extLst>
+          </p:cNvPr>
+          <p:cNvPicPr>
+            <a:picLocks noChangeAspect="1"/>
+          </p:cNvPicPr>
+          <p:nvPr/>
+        </p:nvPicPr>
+        <p:blipFill>
+          <a:blip r:embed="rId4" cstate="print">
+            <a:extLst>
+              <a:ext uri="{28A0092B-C50C-407E-A947-70E740481C1C}">
+                <a14:useLocalDpi xmlns:a14="http://schemas.microsoft.com/office/drawing/2010/main" val="0"/>
+              </a:ext>
+            </a:extLst>
+          </a:blip>
+          <a:stretch>
+            <a:fillRect/>
+          </a:stretch>
+        </p:blipFill>
+        <p:spPr>
+          <a:xfrm>
+            <a:off x="691662" y="2710181"/>
+            <a:ext cx="3722076" cy="3722076"/>
+          </a:xfrm>
+          <a:prstGeom prst="rect">
+            <a:avLst/>
+          </a:prstGeom>
         </p:spPr>
       </p:pic>
     </p:spTree>
